--- a/public/fun/pack/pptx/wedding/결혼식_46_소개중심_새벽시장.pptx
+++ b/public/fun/pack/pptx/wedding/결혼식_46_소개중심_새벽시장.pptx
@@ -3286,6 +3286,14 @@
 <file path=ppt/slides/slide1.xml><?xml version="1.0" encoding="utf-8"?>
 <p:sld xmlns:a="http://schemas.openxmlformats.org/drawingml/2006/main" xmlns:p="http://schemas.openxmlformats.org/presentationml/2006/main" xmlns:r="http://schemas.openxmlformats.org/officeDocument/2006/relationships">
   <p:cSld>
+    <p:bg>
+      <p:bgPr>
+        <a:solidFill>
+          <a:srgbClr val="D5EEF6"/>
+        </a:solidFill>
+        <a:effectLst/>
+      </p:bgPr>
+    </p:bg>
     <p:spTree>
       <p:nvGrpSpPr>
         <p:cNvPr id="1" name=""/>
@@ -3293,30 +3301,120 @@
         <p:nvPr/>
       </p:nvGrpSpPr>
       <p:grpSpPr/>
-      <p:pic>
-        <p:nvPicPr>
-          <p:cNvPr id="3" name="표지 그림" descr="wedding-46.jpg"/>
-          <p:cNvPicPr>
-            <a:picLocks noChangeAspect="1"/>
-          </p:cNvPicPr>
+      <p:sp>
+        <p:nvSpPr>
+          <p:cNvPr id="3" name="사진 자리"/>
+          <p:cNvSpPr/>
           <p:nvPr/>
-        </p:nvPicPr>
-        <p:blipFill>
-          <a:blip r:embed="rId2"/>
-          <a:stretch>
-            <a:fillRect/>
-          </a:stretch>
-        </p:blipFill>
-        <p:spPr>
-          <a:xfrm>
-            <a:off x="0" y="0"/>
-            <a:ext cx="12191695" cy="6858000"/>
+        </p:nvSpPr>
+        <p:spPr>
+          <a:xfrm>
+            <a:off x="7071183" y="960120"/>
+            <a:ext cx="3657508" cy="4526280"/>
+          </a:xfrm>
+          <a:prstGeom prst="roundRect">
+            <a:avLst>
+              <a:gd name="adj" fmla="val 4000"/>
+            </a:avLst>
+          </a:prstGeom>
+          <a:solidFill>
+            <a:srgbClr val="ADDBEB"/>
+          </a:solidFill>
+          <a:ln>
+            <a:noFill/>
+          </a:ln>
+        </p:spPr>
+        <p:txBody>
+          <a:bodyPr rtlCol="0" anchor="ctr" wrap="square" lIns="54864" rIns="54864" tIns="27432" bIns="27432">
+            <a:noAutofit/>
+          </a:bodyPr>
+          <a:lstStyle/>
+          <a:p>
+            <a:pPr algn="ctr">
+              <a:lnSpc>
+                <a:spcPct val="100000"/>
+              </a:lnSpc>
+            </a:pPr>
+            <a:r>
+              <a:rPr sz="1400" b="0" i="0">
+                <a:solidFill>
+                  <a:srgbClr val="274149"/>
+                </a:solidFill>
+              </a:rPr>
+              <a:t>사진을 넣어 주세요</a:t>
+            </a:r>
+          </a:p>
+        </p:txBody>
+      </p:sp>
+      <p:sp>
+        <p:nvSpPr>
+          <p:cNvPr id="4" name="장식"/>
+          <p:cNvSpPr/>
+          <p:nvPr/>
+        </p:nvSpPr>
+        <p:spPr>
+          <a:xfrm>
+            <a:off x="7558851" y="1234439"/>
+            <a:ext cx="3657508" cy="4526280"/>
+          </a:xfrm>
+          <a:prstGeom prst="roundRect">
+            <a:avLst>
+              <a:gd name="adj" fmla="val 4000"/>
+            </a:avLst>
+          </a:prstGeom>
+          <a:noFill/>
+          <a:ln w="9525">
+            <a:solidFill>
+              <a:srgbClr val="26231F"/>
+            </a:solidFill>
+          </a:ln>
+        </p:spPr>
+        <p:txBody>
+          <a:bodyPr rtlCol="0" anchor="ctr"/>
+          <a:lstStyle/>
+          <a:p>
+            <a:pPr algn="ctr"/>
+          </a:p>
+        </p:txBody>
+      </p:sp>
+      <p:sp>
+        <p:nvSpPr>
+          <p:cNvPr id="5" name="라벨"/>
+          <p:cNvSpPr txBox="1"/>
+          <p:nvPr/>
+        </p:nvSpPr>
+        <p:spPr>
+          <a:xfrm>
+            <a:off x="822960" y="2148840"/>
+            <a:ext cx="5608179" cy="274320"/>
           </a:xfrm>
           <a:prstGeom prst="rect">
             <a:avLst/>
           </a:prstGeom>
-        </p:spPr>
-      </p:pic>
+          <a:noFill/>
+        </p:spPr>
+        <p:txBody>
+          <a:bodyPr wrap="square" lIns="54864" rIns="54864" tIns="27432" bIns="27432" anchor="t">
+            <a:noAutofit/>
+          </a:bodyPr>
+          <a:lstStyle/>
+          <a:p>
+            <a:pPr algn="l">
+              <a:lnSpc>
+                <a:spcPct val="115000"/>
+              </a:lnSpc>
+            </a:pPr>
+            <a:r>
+              <a:rPr sz="1000" b="1" i="0" spc="250">
+                <a:solidFill>
+                  <a:srgbClr val="26231F"/>
+                </a:solidFill>
+              </a:rPr>
+              <a:t>WEDDING</a:t>
+            </a:r>
+          </a:p>
+        </p:txBody>
+      </p:sp>
       <p:sp>
         <p:nvSpPr>
           <p:cNvPr id="2" name="Title 1"/>
@@ -3329,8 +3427,8 @@
         </p:nvSpPr>
         <p:spPr>
           <a:xfrm>
-            <a:off x="853418" y="2057400"/>
-            <a:ext cx="6095847" cy="1554480"/>
+            <a:off x="822960" y="2606040"/>
+            <a:ext cx="5608179" cy="1188720"/>
           </a:xfrm>
         </p:spPr>
         <p:txBody>
@@ -3347,7 +3445,7 @@
             <a:r>
               <a:rPr sz="3600" b="1" i="0">
                 <a:solidFill>
-                  <a:srgbClr val="253A41"/>
+                  <a:srgbClr val="26231F"/>
                 </a:solidFill>
               </a:rPr>
               <a:t>저희 결혼합니다</a:t>
@@ -3357,14 +3455,14 @@
       </p:sp>
       <p:sp>
         <p:nvSpPr>
-          <p:cNvPr id="4" name="한 줄 문구"/>
+          <p:cNvPr id="6" name="한 줄 문구"/>
           <p:cNvSpPr txBox="1"/>
           <p:nvPr/>
         </p:nvSpPr>
         <p:spPr>
           <a:xfrm>
-            <a:off x="853418" y="3749039"/>
-            <a:ext cx="6095847" cy="822960"/>
+            <a:off x="822960" y="3886200"/>
+            <a:ext cx="5608179" cy="822960"/>
           </a:xfrm>
           <a:prstGeom prst="rect">
             <a:avLst/>
@@ -3383,26 +3481,26 @@
               </a:lnSpc>
             </a:pPr>
             <a:r>
-              <a:rPr sz="1700" b="0" i="1">
-                <a:solidFill>
-                  <a:srgbClr val="253A41"/>
+              <a:rPr sz="1700" b="0" i="0">
+                <a:solidFill>
+                  <a:srgbClr val="26231F"/>
                 </a:solidFill>
               </a:rPr>
-              <a:t>새해 첫 달에 결혼식을 올립니다</a:t>
-            </a:r>
-          </a:p>
-        </p:txBody>
-      </p:sp>
-      <p:sp>
-        <p:nvSpPr>
-          <p:cNvPr id="5" name="안내 문구"/>
+              <a:t>작은 예식으로 올립니다</a:t>
+            </a:r>
+          </a:p>
+        </p:txBody>
+      </p:sp>
+      <p:sp>
+        <p:nvSpPr>
+          <p:cNvPr id="7" name="안내 문구"/>
           <p:cNvSpPr txBox="1"/>
           <p:nvPr/>
         </p:nvSpPr>
         <p:spPr>
           <a:xfrm>
-            <a:off x="853418" y="4617720"/>
-            <a:ext cx="6095847" cy="914400"/>
+            <a:off x="822960" y="4754880"/>
+            <a:ext cx="5608179" cy="914400"/>
           </a:xfrm>
           <a:prstGeom prst="rect">
             <a:avLst/>
@@ -3423,7 +3521,7 @@
             <a:r>
               <a:rPr sz="1400" b="0" i="0">
                 <a:solidFill>
-                  <a:srgbClr val="666666"/>
+                  <a:srgbClr val="26231F"/>
                 </a:solidFill>
               </a:rPr>
               <a:t>신랑 이름 ♥ 신부 이름</a:t>
@@ -3438,10 +3536,10 @@
             <a:r>
               <a:rPr sz="1400" b="0" i="0">
                 <a:solidFill>
-                  <a:srgbClr val="666666"/>
+                  <a:srgbClr val="26231F"/>
                 </a:solidFill>
               </a:rPr>
-              <a:t>2027. 00. 00 · 예식장 이름</a:t>
+              <a:t>날짜 입력 · 예식장 이름</a:t>
             </a:r>
           </a:p>
         </p:txBody>
@@ -3480,14 +3578,14 @@
         </p:nvSpPr>
         <p:spPr>
           <a:xfrm>
-            <a:off x="0" y="384048"/>
-            <a:ext cx="9509522" cy="896112"/>
-          </a:xfrm>
-          <a:prstGeom prst="homePlate">
+            <a:off x="0" y="6565392"/>
+            <a:ext cx="12191695" cy="292608"/>
+          </a:xfrm>
+          <a:prstGeom prst="rect">
             <a:avLst/>
           </a:prstGeom>
           <a:solidFill>
-            <a:srgbClr val="497483"/>
+            <a:srgbClr val="ADDBEB"/>
           </a:solidFill>
           <a:ln>
             <a:noFill/>
@@ -3503,6 +3601,102 @@
       </p:sp>
       <p:sp>
         <p:nvSpPr>
+          <p:cNvPr id="4" name="장식"/>
+          <p:cNvSpPr/>
+          <p:nvPr/>
+        </p:nvSpPr>
+        <p:spPr>
+          <a:xfrm>
+            <a:off x="640080" y="6400800"/>
+            <a:ext cx="10911535" cy="10972"/>
+          </a:xfrm>
+          <a:prstGeom prst="rect">
+            <a:avLst/>
+          </a:prstGeom>
+          <a:solidFill>
+            <a:srgbClr val="26231F"/>
+          </a:solidFill>
+          <a:ln>
+            <a:noFill/>
+          </a:ln>
+        </p:spPr>
+        <p:txBody>
+          <a:bodyPr rtlCol="0" anchor="ctr"/>
+          <a:lstStyle/>
+          <a:p>
+            <a:pPr algn="ctr"/>
+          </a:p>
+        </p:txBody>
+      </p:sp>
+      <p:sp>
+        <p:nvSpPr>
+          <p:cNvPr id="5" name="하단 라벨"/>
+          <p:cNvSpPr txBox="1"/>
+          <p:nvPr/>
+        </p:nvSpPr>
+        <p:spPr>
+          <a:xfrm>
+            <a:off x="640080" y="6437376"/>
+            <a:ext cx="5486400" cy="274320"/>
+          </a:xfrm>
+          <a:prstGeom prst="rect">
+            <a:avLst/>
+          </a:prstGeom>
+          <a:noFill/>
+        </p:spPr>
+        <p:txBody>
+          <a:bodyPr wrap="square" lIns="54864" rIns="54864" tIns="27432" bIns="27432" anchor="ctr">
+            <a:noAutofit/>
+          </a:bodyPr>
+          <a:lstStyle/>
+          <a:p>
+            <a:pPr algn="l">
+              <a:lnSpc>
+                <a:spcPct val="115000"/>
+              </a:lnSpc>
+            </a:pPr>
+            <a:r>
+              <a:rPr sz="900" b="1" i="0" spc="250">
+                <a:solidFill>
+                  <a:srgbClr val="26231F"/>
+                </a:solidFill>
+              </a:rPr>
+              <a:t>WEDDING</a:t>
+            </a:r>
+          </a:p>
+        </p:txBody>
+      </p:sp>
+      <p:sp>
+        <p:nvSpPr>
+          <p:cNvPr id="6" name="포인트"/>
+          <p:cNvSpPr/>
+          <p:nvPr/>
+        </p:nvSpPr>
+        <p:spPr>
+          <a:xfrm>
+            <a:off x="11213287" y="6473952"/>
+            <a:ext cx="219456" cy="219456"/>
+          </a:xfrm>
+          <a:prstGeom prst="ellipse">
+            <a:avLst/>
+          </a:prstGeom>
+          <a:solidFill>
+            <a:srgbClr val="98CFE1"/>
+          </a:solidFill>
+          <a:ln>
+            <a:noFill/>
+          </a:ln>
+        </p:spPr>
+        <p:txBody>
+          <a:bodyPr rtlCol="0" anchor="ctr"/>
+          <a:lstStyle/>
+          <a:p>
+            <a:pPr algn="ctr"/>
+          </a:p>
+        </p:txBody>
+      </p:sp>
+      <p:sp>
+        <p:nvSpPr>
           <p:cNvPr id="2" name="Title 1"/>
           <p:cNvSpPr>
             <a:spLocks noGrp="1"/>
@@ -3513,8 +3707,8 @@
         </p:nvSpPr>
         <p:spPr>
           <a:xfrm>
-            <a:off x="640080" y="411480"/>
-            <a:ext cx="8412242" cy="822960"/>
+            <a:off x="640080" y="502920"/>
+            <a:ext cx="10911535" cy="914400"/>
           </a:xfrm>
         </p:spPr>
         <p:txBody>
@@ -3531,7 +3725,7 @@
             <a:r>
               <a:rPr sz="3000" b="1" i="0">
                 <a:solidFill>
-                  <a:srgbClr val="FFFFFF"/>
+                  <a:srgbClr val="26231F"/>
                 </a:solidFill>
               </a:rPr>
               <a:t>신랑 · 신부 소개</a:t>
@@ -3541,25 +3735,23 @@
       </p:sp>
       <p:sp>
         <p:nvSpPr>
-          <p:cNvPr id="4" name="사진 자리"/>
+          <p:cNvPr id="7" name="사진 자리"/>
           <p:cNvSpPr/>
           <p:nvPr/>
         </p:nvSpPr>
         <p:spPr>
           <a:xfrm>
-            <a:off x="1950643" y="1645920"/>
-            <a:ext cx="2377440" cy="2377440"/>
+            <a:off x="1996363" y="1600200"/>
+            <a:ext cx="2286000" cy="2286000"/>
           </a:xfrm>
           <a:prstGeom prst="ellipse">
             <a:avLst/>
           </a:prstGeom>
           <a:solidFill>
-            <a:srgbClr val="D6E5EA"/>
+            <a:srgbClr val="D5EEF6"/>
           </a:solidFill>
           <a:ln w="19050">
-            <a:solidFill>
-              <a:srgbClr val="497483"/>
-            </a:solidFill>
+            <a:noFill/>
             <a:prstDash val="dash"/>
           </a:ln>
         </p:spPr>
@@ -3577,7 +3769,7 @@
             <a:r>
               <a:rPr sz="1200" b="0" i="0">
                 <a:solidFill>
-                  <a:srgbClr val="253A41"/>
+                  <a:srgbClr val="8E8780"/>
                 </a:solidFill>
               </a:rPr>
               <a:t>사진</a:t>
@@ -3587,13 +3779,13 @@
       </p:sp>
       <p:sp>
         <p:nvSpPr>
-          <p:cNvPr id="5" name="TextBox 4"/>
+          <p:cNvPr id="8" name="TextBox 7"/>
           <p:cNvSpPr txBox="1"/>
           <p:nvPr/>
         </p:nvSpPr>
         <p:spPr>
           <a:xfrm>
-            <a:off x="640080" y="4114800"/>
+            <a:off x="640080" y="3977639"/>
             <a:ext cx="4998567" cy="411480"/>
           </a:xfrm>
           <a:prstGeom prst="rect">
@@ -3615,7 +3807,7 @@
             <a:r>
               <a:rPr sz="1600" b="1" i="0">
                 <a:solidFill>
-                  <a:srgbClr val="253A41"/>
+                  <a:srgbClr val="274149"/>
                 </a:solidFill>
               </a:rPr>
               <a:t>신랑</a:t>
@@ -3625,14 +3817,14 @@
       </p:sp>
       <p:sp>
         <p:nvSpPr>
-          <p:cNvPr id="6" name="TextBox 5"/>
+          <p:cNvPr id="9" name="TextBox 8"/>
           <p:cNvSpPr txBox="1"/>
           <p:nvPr/>
         </p:nvSpPr>
         <p:spPr>
           <a:xfrm>
-            <a:off x="731519" y="4572000"/>
-            <a:ext cx="4815687" cy="1828800"/>
+            <a:off x="731519" y="4434840"/>
+            <a:ext cx="4815687" cy="1737360"/>
           </a:xfrm>
           <a:prstGeom prst="rect">
             <a:avLst/>
@@ -3693,25 +3885,23 @@
       </p:sp>
       <p:sp>
         <p:nvSpPr>
-          <p:cNvPr id="7" name="사진 자리"/>
+          <p:cNvPr id="10" name="사진 자리"/>
           <p:cNvSpPr/>
           <p:nvPr/>
         </p:nvSpPr>
         <p:spPr>
           <a:xfrm>
-            <a:off x="7863611" y="1645920"/>
-            <a:ext cx="2377440" cy="2377440"/>
+            <a:off x="7909331" y="1600200"/>
+            <a:ext cx="2286000" cy="2286000"/>
           </a:xfrm>
           <a:prstGeom prst="ellipse">
             <a:avLst/>
           </a:prstGeom>
           <a:solidFill>
-            <a:srgbClr val="D6E5EA"/>
+            <a:srgbClr val="D5EEF6"/>
           </a:solidFill>
           <a:ln w="19050">
-            <a:solidFill>
-              <a:srgbClr val="497483"/>
-            </a:solidFill>
+            <a:noFill/>
             <a:prstDash val="dash"/>
           </a:ln>
         </p:spPr>
@@ -3729,7 +3919,7 @@
             <a:r>
               <a:rPr sz="1200" b="0" i="0">
                 <a:solidFill>
-                  <a:srgbClr val="253A41"/>
+                  <a:srgbClr val="8E8780"/>
                 </a:solidFill>
               </a:rPr>
               <a:t>사진</a:t>
@@ -3739,13 +3929,13 @@
       </p:sp>
       <p:sp>
         <p:nvSpPr>
-          <p:cNvPr id="8" name="TextBox 7"/>
+          <p:cNvPr id="11" name="TextBox 10"/>
           <p:cNvSpPr txBox="1"/>
           <p:nvPr/>
         </p:nvSpPr>
         <p:spPr>
           <a:xfrm>
-            <a:off x="6553047" y="4114800"/>
+            <a:off x="6553047" y="3977639"/>
             <a:ext cx="4998567" cy="411480"/>
           </a:xfrm>
           <a:prstGeom prst="rect">
@@ -3767,7 +3957,7 @@
             <a:r>
               <a:rPr sz="1600" b="1" i="0">
                 <a:solidFill>
-                  <a:srgbClr val="253A41"/>
+                  <a:srgbClr val="274149"/>
                 </a:solidFill>
               </a:rPr>
               <a:t>신부</a:t>
@@ -3777,14 +3967,14 @@
       </p:sp>
       <p:sp>
         <p:nvSpPr>
-          <p:cNvPr id="9" name="TextBox 8"/>
+          <p:cNvPr id="12" name="TextBox 11"/>
           <p:cNvSpPr txBox="1"/>
           <p:nvPr/>
         </p:nvSpPr>
         <p:spPr>
           <a:xfrm>
-            <a:off x="6644487" y="4572000"/>
-            <a:ext cx="4815687" cy="1828800"/>
+            <a:off x="6644487" y="4434840"/>
+            <a:ext cx="4815687" cy="1737360"/>
           </a:xfrm>
           <a:prstGeom prst="rect">
             <a:avLst/>
@@ -3877,14 +4067,14 @@
         </p:nvSpPr>
         <p:spPr>
           <a:xfrm>
-            <a:off x="0" y="384048"/>
-            <a:ext cx="9509522" cy="896112"/>
-          </a:xfrm>
-          <a:prstGeom prst="homePlate">
+            <a:off x="0" y="6565392"/>
+            <a:ext cx="12191695" cy="292608"/>
+          </a:xfrm>
+          <a:prstGeom prst="rect">
             <a:avLst/>
           </a:prstGeom>
           <a:solidFill>
-            <a:srgbClr val="497483"/>
+            <a:srgbClr val="ADDBEB"/>
           </a:solidFill>
           <a:ln>
             <a:noFill/>
@@ -3900,6 +4090,102 @@
       </p:sp>
       <p:sp>
         <p:nvSpPr>
+          <p:cNvPr id="4" name="장식"/>
+          <p:cNvSpPr/>
+          <p:nvPr/>
+        </p:nvSpPr>
+        <p:spPr>
+          <a:xfrm>
+            <a:off x="640080" y="6400800"/>
+            <a:ext cx="10911535" cy="10972"/>
+          </a:xfrm>
+          <a:prstGeom prst="rect">
+            <a:avLst/>
+          </a:prstGeom>
+          <a:solidFill>
+            <a:srgbClr val="26231F"/>
+          </a:solidFill>
+          <a:ln>
+            <a:noFill/>
+          </a:ln>
+        </p:spPr>
+        <p:txBody>
+          <a:bodyPr rtlCol="0" anchor="ctr"/>
+          <a:lstStyle/>
+          <a:p>
+            <a:pPr algn="ctr"/>
+          </a:p>
+        </p:txBody>
+      </p:sp>
+      <p:sp>
+        <p:nvSpPr>
+          <p:cNvPr id="5" name="하단 라벨"/>
+          <p:cNvSpPr txBox="1"/>
+          <p:nvPr/>
+        </p:nvSpPr>
+        <p:spPr>
+          <a:xfrm>
+            <a:off x="640080" y="6437376"/>
+            <a:ext cx="5486400" cy="274320"/>
+          </a:xfrm>
+          <a:prstGeom prst="rect">
+            <a:avLst/>
+          </a:prstGeom>
+          <a:noFill/>
+        </p:spPr>
+        <p:txBody>
+          <a:bodyPr wrap="square" lIns="54864" rIns="54864" tIns="27432" bIns="27432" anchor="ctr">
+            <a:noAutofit/>
+          </a:bodyPr>
+          <a:lstStyle/>
+          <a:p>
+            <a:pPr algn="l">
+              <a:lnSpc>
+                <a:spcPct val="115000"/>
+              </a:lnSpc>
+            </a:pPr>
+            <a:r>
+              <a:rPr sz="900" b="1" i="0" spc="250">
+                <a:solidFill>
+                  <a:srgbClr val="26231F"/>
+                </a:solidFill>
+              </a:rPr>
+              <a:t>WEDDING</a:t>
+            </a:r>
+          </a:p>
+        </p:txBody>
+      </p:sp>
+      <p:sp>
+        <p:nvSpPr>
+          <p:cNvPr id="6" name="포인트"/>
+          <p:cNvSpPr/>
+          <p:nvPr/>
+        </p:nvSpPr>
+        <p:spPr>
+          <a:xfrm>
+            <a:off x="11213287" y="6473952"/>
+            <a:ext cx="219456" cy="219456"/>
+          </a:xfrm>
+          <a:prstGeom prst="ellipse">
+            <a:avLst/>
+          </a:prstGeom>
+          <a:solidFill>
+            <a:srgbClr val="98CFE1"/>
+          </a:solidFill>
+          <a:ln>
+            <a:noFill/>
+          </a:ln>
+        </p:spPr>
+        <p:txBody>
+          <a:bodyPr rtlCol="0" anchor="ctr"/>
+          <a:lstStyle/>
+          <a:p>
+            <a:pPr algn="ctr"/>
+          </a:p>
+        </p:txBody>
+      </p:sp>
+      <p:sp>
+        <p:nvSpPr>
           <p:cNvPr id="2" name="Title 1"/>
           <p:cNvSpPr>
             <a:spLocks noGrp="1"/>
@@ -3910,8 +4196,8 @@
         </p:nvSpPr>
         <p:spPr>
           <a:xfrm>
-            <a:off x="640080" y="411480"/>
-            <a:ext cx="8412242" cy="822960"/>
+            <a:off x="640080" y="502920"/>
+            <a:ext cx="10911535" cy="914400"/>
           </a:xfrm>
         </p:spPr>
         <p:txBody>
@@ -3928,7 +4214,7 @@
             <a:r>
               <a:rPr sz="3000" b="1" i="0">
                 <a:solidFill>
-                  <a:srgbClr val="FFFFFF"/>
+                  <a:srgbClr val="26231F"/>
                 </a:solidFill>
               </a:rPr>
               <a:t>우리 두 사람</a:t>
@@ -3938,26 +4224,26 @@
       </p:sp>
       <p:sp>
         <p:nvSpPr>
-          <p:cNvPr id="4" name="왼쪽 칸"/>
+          <p:cNvPr id="7" name="왼쪽 칸"/>
           <p:cNvSpPr/>
           <p:nvPr/>
         </p:nvSpPr>
         <p:spPr>
           <a:xfrm>
-            <a:off x="640080" y="1645920"/>
-            <a:ext cx="5272887" cy="4754880"/>
+            <a:off x="640080" y="1600200"/>
+            <a:ext cx="5272887" cy="4572000"/>
           </a:xfrm>
           <a:prstGeom prst="roundRect">
             <a:avLst>
-              <a:gd name="adj" fmla="val 8000"/>
+              <a:gd name="adj" fmla="val 3000"/>
             </a:avLst>
           </a:prstGeom>
           <a:solidFill>
-            <a:srgbClr val="F2F6F8"/>
+            <a:srgbClr val="FFFFFF"/>
           </a:solidFill>
-          <a:ln w="12700">
+          <a:ln w="9525">
             <a:solidFill>
-              <a:srgbClr val="D6E5EA"/>
+              <a:srgbClr val="D5EEF6"/>
             </a:solidFill>
           </a:ln>
         </p:spPr>
@@ -3971,13 +4257,42 @@
       </p:sp>
       <p:sp>
         <p:nvSpPr>
-          <p:cNvPr id="5" name="칸 제목 바"/>
+          <p:cNvPr id="8" name="위쪽 띠"/>
           <p:cNvSpPr/>
           <p:nvPr/>
         </p:nvSpPr>
         <p:spPr>
           <a:xfrm>
-            <a:off x="640080" y="1645920"/>
+            <a:off x="649224" y="1609344"/>
+            <a:ext cx="5254599" cy="82296"/>
+          </a:xfrm>
+          <a:prstGeom prst="rect">
+            <a:avLst/>
+          </a:prstGeom>
+          <a:solidFill>
+            <a:srgbClr val="98CFE1"/>
+          </a:solidFill>
+          <a:ln>
+            <a:noFill/>
+          </a:ln>
+        </p:spPr>
+        <p:txBody>
+          <a:bodyPr rtlCol="0" anchor="ctr"/>
+          <a:lstStyle/>
+          <a:p>
+            <a:pPr algn="ctr"/>
+          </a:p>
+        </p:txBody>
+      </p:sp>
+      <p:sp>
+        <p:nvSpPr>
+          <p:cNvPr id="9" name="칸 제목 바"/>
+          <p:cNvSpPr/>
+          <p:nvPr/>
+        </p:nvSpPr>
+        <p:spPr>
+          <a:xfrm>
+            <a:off x="640080" y="1600200"/>
             <a:ext cx="5272887" cy="640080"/>
           </a:xfrm>
           <a:prstGeom prst="roundRect">
@@ -3986,7 +4301,7 @@
             </a:avLst>
           </a:prstGeom>
           <a:solidFill>
-            <a:srgbClr val="497483"/>
+            <a:srgbClr val="98CFE1"/>
           </a:solidFill>
           <a:ln>
             <a:noFill/>
@@ -4002,13 +4317,13 @@
       </p:sp>
       <p:sp>
         <p:nvSpPr>
-          <p:cNvPr id="6" name="TextBox 5"/>
+          <p:cNvPr id="10" name="TextBox 9"/>
           <p:cNvSpPr txBox="1"/>
           <p:nvPr/>
         </p:nvSpPr>
         <p:spPr>
           <a:xfrm>
-            <a:off x="822959" y="1645920"/>
+            <a:off x="822959" y="1600200"/>
             <a:ext cx="4907127" cy="640080"/>
           </a:xfrm>
           <a:prstGeom prst="rect">
@@ -4030,7 +4345,7 @@
             <a:r>
               <a:rPr sz="1800" b="1" i="0">
                 <a:solidFill>
-                  <a:srgbClr val="FFFFFF"/>
+                  <a:srgbClr val="26231F"/>
                 </a:solidFill>
               </a:rPr>
               <a:t>닮은 점</a:t>
@@ -4040,14 +4355,14 @@
       </p:sp>
       <p:sp>
         <p:nvSpPr>
-          <p:cNvPr id="7" name="TextBox 6"/>
+          <p:cNvPr id="11" name="TextBox 10"/>
           <p:cNvSpPr txBox="1"/>
           <p:nvPr/>
         </p:nvSpPr>
         <p:spPr>
           <a:xfrm>
-            <a:off x="868680" y="2468880"/>
-            <a:ext cx="4815687" cy="3840480"/>
+            <a:off x="868680" y="2423160"/>
+            <a:ext cx="4815687" cy="3657600"/>
           </a:xfrm>
           <a:prstGeom prst="rect">
             <a:avLst/>
@@ -4073,7 +4388,7 @@
             <a:r>
               <a:rPr sz="1500" b="0" i="0">
                 <a:solidFill>
-                  <a:srgbClr val="2B2B2B"/>
+                  <a:srgbClr val="26231F"/>
                 </a:solidFill>
               </a:rPr>
               <a:t>내용을 입력하세요</a:t>
@@ -4093,7 +4408,7 @@
             <a:r>
               <a:rPr sz="1500" b="0" i="0">
                 <a:solidFill>
-                  <a:srgbClr val="2B2B2B"/>
+                  <a:srgbClr val="26231F"/>
                 </a:solidFill>
               </a:rPr>
               <a:t>내용을 입력하세요</a:t>
@@ -4113,7 +4428,7 @@
             <a:r>
               <a:rPr sz="1500" b="0" i="0">
                 <a:solidFill>
-                  <a:srgbClr val="2B2B2B"/>
+                  <a:srgbClr val="26231F"/>
                 </a:solidFill>
               </a:rPr>
               <a:t>내용을 입력하세요</a:t>
@@ -4123,26 +4438,26 @@
       </p:sp>
       <p:sp>
         <p:nvSpPr>
-          <p:cNvPr id="8" name="오른쪽 칸"/>
+          <p:cNvPr id="12" name="오른쪽 칸"/>
           <p:cNvSpPr/>
           <p:nvPr/>
         </p:nvSpPr>
         <p:spPr>
           <a:xfrm>
-            <a:off x="6278727" y="1645920"/>
-            <a:ext cx="5272887" cy="4754880"/>
+            <a:off x="6278727" y="1600200"/>
+            <a:ext cx="5272887" cy="4572000"/>
           </a:xfrm>
           <a:prstGeom prst="roundRect">
             <a:avLst>
-              <a:gd name="adj" fmla="val 8000"/>
+              <a:gd name="adj" fmla="val 3000"/>
             </a:avLst>
           </a:prstGeom>
           <a:solidFill>
-            <a:srgbClr val="D6E5EA"/>
+            <a:srgbClr val="FFFFFF"/>
           </a:solidFill>
-          <a:ln w="12700">
+          <a:ln w="9525">
             <a:solidFill>
-              <a:srgbClr val="D6E5EA"/>
+              <a:srgbClr val="D5EEF6"/>
             </a:solidFill>
           </a:ln>
         </p:spPr>
@@ -4156,13 +4471,42 @@
       </p:sp>
       <p:sp>
         <p:nvSpPr>
-          <p:cNvPr id="9" name="칸 제목 바"/>
+          <p:cNvPr id="13" name="위쪽 띠"/>
           <p:cNvSpPr/>
           <p:nvPr/>
         </p:nvSpPr>
         <p:spPr>
           <a:xfrm>
-            <a:off x="6278727" y="1645920"/>
+            <a:off x="6287871" y="1609344"/>
+            <a:ext cx="5254599" cy="82296"/>
+          </a:xfrm>
+          <a:prstGeom prst="rect">
+            <a:avLst/>
+          </a:prstGeom>
+          <a:solidFill>
+            <a:srgbClr val="98CFE1"/>
+          </a:solidFill>
+          <a:ln>
+            <a:noFill/>
+          </a:ln>
+        </p:spPr>
+        <p:txBody>
+          <a:bodyPr rtlCol="0" anchor="ctr"/>
+          <a:lstStyle/>
+          <a:p>
+            <a:pPr algn="ctr"/>
+          </a:p>
+        </p:txBody>
+      </p:sp>
+      <p:sp>
+        <p:nvSpPr>
+          <p:cNvPr id="14" name="칸 제목 바"/>
+          <p:cNvSpPr/>
+          <p:nvPr/>
+        </p:nvSpPr>
+        <p:spPr>
+          <a:xfrm>
+            <a:off x="6278727" y="1600200"/>
             <a:ext cx="5272887" cy="640080"/>
           </a:xfrm>
           <a:prstGeom prst="roundRect">
@@ -4171,7 +4515,7 @@
             </a:avLst>
           </a:prstGeom>
           <a:solidFill>
-            <a:srgbClr val="253A41"/>
+            <a:srgbClr val="274149"/>
           </a:solidFill>
           <a:ln>
             <a:noFill/>
@@ -4187,13 +4531,13 @@
       </p:sp>
       <p:sp>
         <p:nvSpPr>
-          <p:cNvPr id="10" name="TextBox 9"/>
+          <p:cNvPr id="15" name="TextBox 14"/>
           <p:cNvSpPr txBox="1"/>
           <p:nvPr/>
         </p:nvSpPr>
         <p:spPr>
           <a:xfrm>
-            <a:off x="6461607" y="1645920"/>
+            <a:off x="6461607" y="1600200"/>
             <a:ext cx="4907127" cy="640080"/>
           </a:xfrm>
           <a:prstGeom prst="rect">
@@ -4225,14 +4569,14 @@
       </p:sp>
       <p:sp>
         <p:nvSpPr>
-          <p:cNvPr id="11" name="TextBox 10"/>
+          <p:cNvPr id="16" name="TextBox 15"/>
           <p:cNvSpPr txBox="1"/>
           <p:nvPr/>
         </p:nvSpPr>
         <p:spPr>
           <a:xfrm>
-            <a:off x="6507327" y="2468880"/>
-            <a:ext cx="4815687" cy="3840480"/>
+            <a:off x="6507327" y="2423160"/>
+            <a:ext cx="4815687" cy="3657600"/>
           </a:xfrm>
           <a:prstGeom prst="rect">
             <a:avLst/>
@@ -4258,7 +4602,7 @@
             <a:r>
               <a:rPr sz="1500" b="0" i="0">
                 <a:solidFill>
-                  <a:srgbClr val="2B2B2B"/>
+                  <a:srgbClr val="26231F"/>
                 </a:solidFill>
               </a:rPr>
               <a:t>내용을 입력하세요</a:t>
@@ -4278,7 +4622,7 @@
             <a:r>
               <a:rPr sz="1500" b="0" i="0">
                 <a:solidFill>
-                  <a:srgbClr val="2B2B2B"/>
+                  <a:srgbClr val="26231F"/>
                 </a:solidFill>
               </a:rPr>
               <a:t>내용을 입력하세요</a:t>
@@ -4298,7 +4642,7 @@
             <a:r>
               <a:rPr sz="1500" b="0" i="0">
                 <a:solidFill>
-                  <a:srgbClr val="2B2B2B"/>
+                  <a:srgbClr val="26231F"/>
                 </a:solidFill>
               </a:rPr>
               <a:t>내용을 입력하세요</a:t>
@@ -4340,14 +4684,14 @@
         </p:nvSpPr>
         <p:spPr>
           <a:xfrm>
-            <a:off x="0" y="384048"/>
-            <a:ext cx="9509522" cy="896112"/>
-          </a:xfrm>
-          <a:prstGeom prst="homePlate">
+            <a:off x="0" y="6565392"/>
+            <a:ext cx="12191695" cy="292608"/>
+          </a:xfrm>
+          <a:prstGeom prst="rect">
             <a:avLst/>
           </a:prstGeom>
           <a:solidFill>
-            <a:srgbClr val="497483"/>
+            <a:srgbClr val="ADDBEB"/>
           </a:solidFill>
           <a:ln>
             <a:noFill/>
@@ -4363,6 +4707,102 @@
       </p:sp>
       <p:sp>
         <p:nvSpPr>
+          <p:cNvPr id="4" name="장식"/>
+          <p:cNvSpPr/>
+          <p:nvPr/>
+        </p:nvSpPr>
+        <p:spPr>
+          <a:xfrm>
+            <a:off x="640080" y="6400800"/>
+            <a:ext cx="10911535" cy="10972"/>
+          </a:xfrm>
+          <a:prstGeom prst="rect">
+            <a:avLst/>
+          </a:prstGeom>
+          <a:solidFill>
+            <a:srgbClr val="26231F"/>
+          </a:solidFill>
+          <a:ln>
+            <a:noFill/>
+          </a:ln>
+        </p:spPr>
+        <p:txBody>
+          <a:bodyPr rtlCol="0" anchor="ctr"/>
+          <a:lstStyle/>
+          <a:p>
+            <a:pPr algn="ctr"/>
+          </a:p>
+        </p:txBody>
+      </p:sp>
+      <p:sp>
+        <p:nvSpPr>
+          <p:cNvPr id="5" name="하단 라벨"/>
+          <p:cNvSpPr txBox="1"/>
+          <p:nvPr/>
+        </p:nvSpPr>
+        <p:spPr>
+          <a:xfrm>
+            <a:off x="640080" y="6437376"/>
+            <a:ext cx="5486400" cy="274320"/>
+          </a:xfrm>
+          <a:prstGeom prst="rect">
+            <a:avLst/>
+          </a:prstGeom>
+          <a:noFill/>
+        </p:spPr>
+        <p:txBody>
+          <a:bodyPr wrap="square" lIns="54864" rIns="54864" tIns="27432" bIns="27432" anchor="ctr">
+            <a:noAutofit/>
+          </a:bodyPr>
+          <a:lstStyle/>
+          <a:p>
+            <a:pPr algn="l">
+              <a:lnSpc>
+                <a:spcPct val="115000"/>
+              </a:lnSpc>
+            </a:pPr>
+            <a:r>
+              <a:rPr sz="900" b="1" i="0" spc="250">
+                <a:solidFill>
+                  <a:srgbClr val="26231F"/>
+                </a:solidFill>
+              </a:rPr>
+              <a:t>WEDDING</a:t>
+            </a:r>
+          </a:p>
+        </p:txBody>
+      </p:sp>
+      <p:sp>
+        <p:nvSpPr>
+          <p:cNvPr id="6" name="포인트"/>
+          <p:cNvSpPr/>
+          <p:nvPr/>
+        </p:nvSpPr>
+        <p:spPr>
+          <a:xfrm>
+            <a:off x="11213287" y="6473952"/>
+            <a:ext cx="219456" cy="219456"/>
+          </a:xfrm>
+          <a:prstGeom prst="ellipse">
+            <a:avLst/>
+          </a:prstGeom>
+          <a:solidFill>
+            <a:srgbClr val="98CFE1"/>
+          </a:solidFill>
+          <a:ln>
+            <a:noFill/>
+          </a:ln>
+        </p:spPr>
+        <p:txBody>
+          <a:bodyPr rtlCol="0" anchor="ctr"/>
+          <a:lstStyle/>
+          <a:p>
+            <a:pPr algn="ctr"/>
+          </a:p>
+        </p:txBody>
+      </p:sp>
+      <p:sp>
+        <p:nvSpPr>
           <p:cNvPr id="2" name="Title 1"/>
           <p:cNvSpPr>
             <a:spLocks noGrp="1"/>
@@ -4373,8 +4813,8 @@
         </p:nvSpPr>
         <p:spPr>
           <a:xfrm>
-            <a:off x="640080" y="411480"/>
-            <a:ext cx="8412242" cy="822960"/>
+            <a:off x="640080" y="502920"/>
+            <a:ext cx="10911535" cy="914400"/>
           </a:xfrm>
         </p:spPr>
         <p:txBody>
@@ -4391,7 +4831,7 @@
             <a:r>
               <a:rPr sz="3000" b="1" i="0">
                 <a:solidFill>
-                  <a:srgbClr val="FFFFFF"/>
+                  <a:srgbClr val="26231F"/>
                 </a:solidFill>
               </a:rPr>
               <a:t>서로에게 하고 싶은 말</a:t>
@@ -4401,26 +4841,26 @@
       </p:sp>
       <p:sp>
         <p:nvSpPr>
-          <p:cNvPr id="4" name="왼쪽 칸"/>
+          <p:cNvPr id="7" name="왼쪽 칸"/>
           <p:cNvSpPr/>
           <p:nvPr/>
         </p:nvSpPr>
         <p:spPr>
           <a:xfrm>
-            <a:off x="640080" y="1645920"/>
-            <a:ext cx="5272887" cy="4754880"/>
+            <a:off x="640080" y="1600200"/>
+            <a:ext cx="5272887" cy="4572000"/>
           </a:xfrm>
           <a:prstGeom prst="roundRect">
             <a:avLst>
-              <a:gd name="adj" fmla="val 8000"/>
+              <a:gd name="adj" fmla="val 3000"/>
             </a:avLst>
           </a:prstGeom>
           <a:solidFill>
-            <a:srgbClr val="F2F6F8"/>
+            <a:srgbClr val="FFFFFF"/>
           </a:solidFill>
-          <a:ln w="12700">
+          <a:ln w="9525">
             <a:solidFill>
-              <a:srgbClr val="D6E5EA"/>
+              <a:srgbClr val="D5EEF6"/>
             </a:solidFill>
           </a:ln>
         </p:spPr>
@@ -4434,13 +4874,42 @@
       </p:sp>
       <p:sp>
         <p:nvSpPr>
-          <p:cNvPr id="5" name="칸 제목 바"/>
+          <p:cNvPr id="8" name="위쪽 띠"/>
           <p:cNvSpPr/>
           <p:nvPr/>
         </p:nvSpPr>
         <p:spPr>
           <a:xfrm>
-            <a:off x="640080" y="1645920"/>
+            <a:off x="649224" y="1609344"/>
+            <a:ext cx="5254599" cy="82296"/>
+          </a:xfrm>
+          <a:prstGeom prst="rect">
+            <a:avLst/>
+          </a:prstGeom>
+          <a:solidFill>
+            <a:srgbClr val="98CFE1"/>
+          </a:solidFill>
+          <a:ln>
+            <a:noFill/>
+          </a:ln>
+        </p:spPr>
+        <p:txBody>
+          <a:bodyPr rtlCol="0" anchor="ctr"/>
+          <a:lstStyle/>
+          <a:p>
+            <a:pPr algn="ctr"/>
+          </a:p>
+        </p:txBody>
+      </p:sp>
+      <p:sp>
+        <p:nvSpPr>
+          <p:cNvPr id="9" name="칸 제목 바"/>
+          <p:cNvSpPr/>
+          <p:nvPr/>
+        </p:nvSpPr>
+        <p:spPr>
+          <a:xfrm>
+            <a:off x="640080" y="1600200"/>
             <a:ext cx="5272887" cy="640080"/>
           </a:xfrm>
           <a:prstGeom prst="roundRect">
@@ -4449,7 +4918,7 @@
             </a:avLst>
           </a:prstGeom>
           <a:solidFill>
-            <a:srgbClr val="497483"/>
+            <a:srgbClr val="98CFE1"/>
           </a:solidFill>
           <a:ln>
             <a:noFill/>
@@ -4465,13 +4934,13 @@
       </p:sp>
       <p:sp>
         <p:nvSpPr>
-          <p:cNvPr id="6" name="TextBox 5"/>
+          <p:cNvPr id="10" name="TextBox 9"/>
           <p:cNvSpPr txBox="1"/>
           <p:nvPr/>
         </p:nvSpPr>
         <p:spPr>
           <a:xfrm>
-            <a:off x="822959" y="1645920"/>
+            <a:off x="822959" y="1600200"/>
             <a:ext cx="4907127" cy="640080"/>
           </a:xfrm>
           <a:prstGeom prst="rect">
@@ -4493,7 +4962,7 @@
             <a:r>
               <a:rPr sz="1800" b="1" i="0">
                 <a:solidFill>
-                  <a:srgbClr val="FFFFFF"/>
+                  <a:srgbClr val="26231F"/>
                 </a:solidFill>
               </a:rPr>
               <a:t>신랑이 신부에게</a:t>
@@ -4503,14 +4972,14 @@
       </p:sp>
       <p:sp>
         <p:nvSpPr>
-          <p:cNvPr id="7" name="TextBox 6"/>
+          <p:cNvPr id="11" name="TextBox 10"/>
           <p:cNvSpPr txBox="1"/>
           <p:nvPr/>
         </p:nvSpPr>
         <p:spPr>
           <a:xfrm>
-            <a:off x="868680" y="2468880"/>
-            <a:ext cx="4815687" cy="3840480"/>
+            <a:off x="868680" y="2423160"/>
+            <a:ext cx="4815687" cy="3657600"/>
           </a:xfrm>
           <a:prstGeom prst="rect">
             <a:avLst/>
@@ -4536,7 +5005,7 @@
             <a:r>
               <a:rPr sz="1500" b="0" i="0">
                 <a:solidFill>
-                  <a:srgbClr val="2B2B2B"/>
+                  <a:srgbClr val="26231F"/>
                 </a:solidFill>
               </a:rPr>
               <a:t>하고 싶은 말을 적어 주세요</a:t>
@@ -4546,26 +5015,26 @@
       </p:sp>
       <p:sp>
         <p:nvSpPr>
-          <p:cNvPr id="8" name="오른쪽 칸"/>
+          <p:cNvPr id="12" name="오른쪽 칸"/>
           <p:cNvSpPr/>
           <p:nvPr/>
         </p:nvSpPr>
         <p:spPr>
           <a:xfrm>
-            <a:off x="6278727" y="1645920"/>
-            <a:ext cx="5272887" cy="4754880"/>
+            <a:off x="6278727" y="1600200"/>
+            <a:ext cx="5272887" cy="4572000"/>
           </a:xfrm>
           <a:prstGeom prst="roundRect">
             <a:avLst>
-              <a:gd name="adj" fmla="val 8000"/>
+              <a:gd name="adj" fmla="val 3000"/>
             </a:avLst>
           </a:prstGeom>
           <a:solidFill>
-            <a:srgbClr val="D6E5EA"/>
+            <a:srgbClr val="FFFFFF"/>
           </a:solidFill>
-          <a:ln w="12700">
+          <a:ln w="9525">
             <a:solidFill>
-              <a:srgbClr val="D6E5EA"/>
+              <a:srgbClr val="D5EEF6"/>
             </a:solidFill>
           </a:ln>
         </p:spPr>
@@ -4579,13 +5048,42 @@
       </p:sp>
       <p:sp>
         <p:nvSpPr>
-          <p:cNvPr id="9" name="칸 제목 바"/>
+          <p:cNvPr id="13" name="위쪽 띠"/>
           <p:cNvSpPr/>
           <p:nvPr/>
         </p:nvSpPr>
         <p:spPr>
           <a:xfrm>
-            <a:off x="6278727" y="1645920"/>
+            <a:off x="6287871" y="1609344"/>
+            <a:ext cx="5254599" cy="82296"/>
+          </a:xfrm>
+          <a:prstGeom prst="rect">
+            <a:avLst/>
+          </a:prstGeom>
+          <a:solidFill>
+            <a:srgbClr val="98CFE1"/>
+          </a:solidFill>
+          <a:ln>
+            <a:noFill/>
+          </a:ln>
+        </p:spPr>
+        <p:txBody>
+          <a:bodyPr rtlCol="0" anchor="ctr"/>
+          <a:lstStyle/>
+          <a:p>
+            <a:pPr algn="ctr"/>
+          </a:p>
+        </p:txBody>
+      </p:sp>
+      <p:sp>
+        <p:nvSpPr>
+          <p:cNvPr id="14" name="칸 제목 바"/>
+          <p:cNvSpPr/>
+          <p:nvPr/>
+        </p:nvSpPr>
+        <p:spPr>
+          <a:xfrm>
+            <a:off x="6278727" y="1600200"/>
             <a:ext cx="5272887" cy="640080"/>
           </a:xfrm>
           <a:prstGeom prst="roundRect">
@@ -4594,7 +5092,7 @@
             </a:avLst>
           </a:prstGeom>
           <a:solidFill>
-            <a:srgbClr val="253A41"/>
+            <a:srgbClr val="274149"/>
           </a:solidFill>
           <a:ln>
             <a:noFill/>
@@ -4610,13 +5108,13 @@
       </p:sp>
       <p:sp>
         <p:nvSpPr>
-          <p:cNvPr id="10" name="TextBox 9"/>
+          <p:cNvPr id="15" name="TextBox 14"/>
           <p:cNvSpPr txBox="1"/>
           <p:nvPr/>
         </p:nvSpPr>
         <p:spPr>
           <a:xfrm>
-            <a:off x="6461607" y="1645920"/>
+            <a:off x="6461607" y="1600200"/>
             <a:ext cx="4907127" cy="640080"/>
           </a:xfrm>
           <a:prstGeom prst="rect">
@@ -4648,14 +5146,14 @@
       </p:sp>
       <p:sp>
         <p:nvSpPr>
-          <p:cNvPr id="11" name="TextBox 10"/>
+          <p:cNvPr id="16" name="TextBox 15"/>
           <p:cNvSpPr txBox="1"/>
           <p:nvPr/>
         </p:nvSpPr>
         <p:spPr>
           <a:xfrm>
-            <a:off x="6507327" y="2468880"/>
-            <a:ext cx="4815687" cy="3840480"/>
+            <a:off x="6507327" y="2423160"/>
+            <a:ext cx="4815687" cy="3657600"/>
           </a:xfrm>
           <a:prstGeom prst="rect">
             <a:avLst/>
@@ -4681,7 +5179,7 @@
             <a:r>
               <a:rPr sz="1500" b="0" i="0">
                 <a:solidFill>
-                  <a:srgbClr val="2B2B2B"/>
+                  <a:srgbClr val="26231F"/>
                 </a:solidFill>
               </a:rPr>
               <a:t>하고 싶은 말을 적어 주세요</a:t>
@@ -4723,14 +5221,14 @@
         </p:nvSpPr>
         <p:spPr>
           <a:xfrm>
-            <a:off x="0" y="384048"/>
-            <a:ext cx="9509522" cy="896112"/>
-          </a:xfrm>
-          <a:prstGeom prst="homePlate">
+            <a:off x="0" y="6565392"/>
+            <a:ext cx="12191695" cy="292608"/>
+          </a:xfrm>
+          <a:prstGeom prst="rect">
             <a:avLst/>
           </a:prstGeom>
           <a:solidFill>
-            <a:srgbClr val="497483"/>
+            <a:srgbClr val="ADDBEB"/>
           </a:solidFill>
           <a:ln>
             <a:noFill/>
@@ -4746,6 +5244,102 @@
       </p:sp>
       <p:sp>
         <p:nvSpPr>
+          <p:cNvPr id="4" name="장식"/>
+          <p:cNvSpPr/>
+          <p:nvPr/>
+        </p:nvSpPr>
+        <p:spPr>
+          <a:xfrm>
+            <a:off x="640080" y="6400800"/>
+            <a:ext cx="10911535" cy="10972"/>
+          </a:xfrm>
+          <a:prstGeom prst="rect">
+            <a:avLst/>
+          </a:prstGeom>
+          <a:solidFill>
+            <a:srgbClr val="26231F"/>
+          </a:solidFill>
+          <a:ln>
+            <a:noFill/>
+          </a:ln>
+        </p:spPr>
+        <p:txBody>
+          <a:bodyPr rtlCol="0" anchor="ctr"/>
+          <a:lstStyle/>
+          <a:p>
+            <a:pPr algn="ctr"/>
+          </a:p>
+        </p:txBody>
+      </p:sp>
+      <p:sp>
+        <p:nvSpPr>
+          <p:cNvPr id="5" name="하단 라벨"/>
+          <p:cNvSpPr txBox="1"/>
+          <p:nvPr/>
+        </p:nvSpPr>
+        <p:spPr>
+          <a:xfrm>
+            <a:off x="640080" y="6437376"/>
+            <a:ext cx="5486400" cy="274320"/>
+          </a:xfrm>
+          <a:prstGeom prst="rect">
+            <a:avLst/>
+          </a:prstGeom>
+          <a:noFill/>
+        </p:spPr>
+        <p:txBody>
+          <a:bodyPr wrap="square" lIns="54864" rIns="54864" tIns="27432" bIns="27432" anchor="ctr">
+            <a:noAutofit/>
+          </a:bodyPr>
+          <a:lstStyle/>
+          <a:p>
+            <a:pPr algn="l">
+              <a:lnSpc>
+                <a:spcPct val="115000"/>
+              </a:lnSpc>
+            </a:pPr>
+            <a:r>
+              <a:rPr sz="900" b="1" i="0" spc="250">
+                <a:solidFill>
+                  <a:srgbClr val="26231F"/>
+                </a:solidFill>
+              </a:rPr>
+              <a:t>WEDDING</a:t>
+            </a:r>
+          </a:p>
+        </p:txBody>
+      </p:sp>
+      <p:sp>
+        <p:nvSpPr>
+          <p:cNvPr id="6" name="포인트"/>
+          <p:cNvSpPr/>
+          <p:nvPr/>
+        </p:nvSpPr>
+        <p:spPr>
+          <a:xfrm>
+            <a:off x="11213287" y="6473952"/>
+            <a:ext cx="219456" cy="219456"/>
+          </a:xfrm>
+          <a:prstGeom prst="ellipse">
+            <a:avLst/>
+          </a:prstGeom>
+          <a:solidFill>
+            <a:srgbClr val="98CFE1"/>
+          </a:solidFill>
+          <a:ln>
+            <a:noFill/>
+          </a:ln>
+        </p:spPr>
+        <p:txBody>
+          <a:bodyPr rtlCol="0" anchor="ctr"/>
+          <a:lstStyle/>
+          <a:p>
+            <a:pPr algn="ctr"/>
+          </a:p>
+        </p:txBody>
+      </p:sp>
+      <p:sp>
+        <p:nvSpPr>
           <p:cNvPr id="2" name="Title 1"/>
           <p:cNvSpPr>
             <a:spLocks noGrp="1"/>
@@ -4756,8 +5350,8 @@
         </p:nvSpPr>
         <p:spPr>
           <a:xfrm>
-            <a:off x="640080" y="411480"/>
-            <a:ext cx="8412242" cy="822960"/>
+            <a:off x="640080" y="502920"/>
+            <a:ext cx="10911535" cy="914400"/>
           </a:xfrm>
         </p:spPr>
         <p:txBody>
@@ -4774,7 +5368,7 @@
             <a:r>
               <a:rPr sz="3000" b="1" i="0">
                 <a:solidFill>
-                  <a:srgbClr val="FFFFFF"/>
+                  <a:srgbClr val="26231F"/>
                 </a:solidFill>
               </a:rPr>
               <a:t>웨딩 사진</a:t>
@@ -4784,14 +5378,14 @@
       </p:sp>
       <p:sp>
         <p:nvSpPr>
-          <p:cNvPr id="4" name="사진 자리"/>
+          <p:cNvPr id="7" name="사진 자리"/>
           <p:cNvSpPr/>
           <p:nvPr/>
         </p:nvSpPr>
         <p:spPr>
           <a:xfrm>
-            <a:off x="640080" y="1645920"/>
-            <a:ext cx="3515258" cy="2286000"/>
+            <a:off x="640080" y="1600200"/>
+            <a:ext cx="3515258" cy="2194560"/>
           </a:xfrm>
           <a:prstGeom prst="roundRect">
             <a:avLst>
@@ -4799,12 +5393,10 @@
             </a:avLst>
           </a:prstGeom>
           <a:solidFill>
-            <a:srgbClr val="D6E5EA"/>
+            <a:srgbClr val="D5EEF6"/>
           </a:solidFill>
           <a:ln w="19050">
-            <a:solidFill>
-              <a:srgbClr val="497483"/>
-            </a:solidFill>
+            <a:noFill/>
             <a:prstDash val="dash"/>
           </a:ln>
         </p:spPr>
@@ -4822,7 +5414,7 @@
             <a:r>
               <a:rPr sz="1200" b="0" i="0">
                 <a:solidFill>
-                  <a:srgbClr val="253A41"/>
+                  <a:srgbClr val="8E8780"/>
                 </a:solidFill>
               </a:rPr>
               <a:t>사진 1</a:t>
@@ -4832,14 +5424,14 @@
       </p:sp>
       <p:sp>
         <p:nvSpPr>
-          <p:cNvPr id="5" name="사진 자리"/>
+          <p:cNvPr id="8" name="사진 자리"/>
           <p:cNvSpPr/>
           <p:nvPr/>
         </p:nvSpPr>
         <p:spPr>
           <a:xfrm>
-            <a:off x="4338218" y="1645920"/>
-            <a:ext cx="3515258" cy="2286000"/>
+            <a:off x="4338218" y="1600200"/>
+            <a:ext cx="3515258" cy="2194560"/>
           </a:xfrm>
           <a:prstGeom prst="roundRect">
             <a:avLst>
@@ -4847,12 +5439,10 @@
             </a:avLst>
           </a:prstGeom>
           <a:solidFill>
-            <a:srgbClr val="D6E5EA"/>
+            <a:srgbClr val="D5EEF6"/>
           </a:solidFill>
           <a:ln w="19050">
-            <a:solidFill>
-              <a:srgbClr val="497483"/>
-            </a:solidFill>
+            <a:noFill/>
             <a:prstDash val="dash"/>
           </a:ln>
         </p:spPr>
@@ -4870,7 +5460,7 @@
             <a:r>
               <a:rPr sz="1200" b="0" i="0">
                 <a:solidFill>
-                  <a:srgbClr val="253A41"/>
+                  <a:srgbClr val="8E8780"/>
                 </a:solidFill>
               </a:rPr>
               <a:t>사진 2</a:t>
@@ -4880,14 +5470,14 @@
       </p:sp>
       <p:sp>
         <p:nvSpPr>
-          <p:cNvPr id="6" name="사진 자리"/>
+          <p:cNvPr id="9" name="사진 자리"/>
           <p:cNvSpPr/>
           <p:nvPr/>
         </p:nvSpPr>
         <p:spPr>
           <a:xfrm>
-            <a:off x="8036356" y="1645920"/>
-            <a:ext cx="3515258" cy="2286000"/>
+            <a:off x="8036356" y="1600200"/>
+            <a:ext cx="3515258" cy="2194560"/>
           </a:xfrm>
           <a:prstGeom prst="roundRect">
             <a:avLst>
@@ -4895,12 +5485,10 @@
             </a:avLst>
           </a:prstGeom>
           <a:solidFill>
-            <a:srgbClr val="D6E5EA"/>
+            <a:srgbClr val="D5EEF6"/>
           </a:solidFill>
           <a:ln w="19050">
-            <a:solidFill>
-              <a:srgbClr val="497483"/>
-            </a:solidFill>
+            <a:noFill/>
             <a:prstDash val="dash"/>
           </a:ln>
         </p:spPr>
@@ -4918,7 +5506,7 @@
             <a:r>
               <a:rPr sz="1200" b="0" i="0">
                 <a:solidFill>
-                  <a:srgbClr val="253A41"/>
+                  <a:srgbClr val="8E8780"/>
                 </a:solidFill>
               </a:rPr>
               <a:t>사진 3</a:t>
@@ -4928,14 +5516,14 @@
       </p:sp>
       <p:sp>
         <p:nvSpPr>
-          <p:cNvPr id="7" name="사진 자리"/>
+          <p:cNvPr id="10" name="사진 자리"/>
           <p:cNvSpPr/>
           <p:nvPr/>
         </p:nvSpPr>
         <p:spPr>
           <a:xfrm>
-            <a:off x="640080" y="4114800"/>
-            <a:ext cx="3515258" cy="2286000"/>
+            <a:off x="640080" y="3977639"/>
+            <a:ext cx="3515258" cy="2194560"/>
           </a:xfrm>
           <a:prstGeom prst="roundRect">
             <a:avLst>
@@ -4943,12 +5531,10 @@
             </a:avLst>
           </a:prstGeom>
           <a:solidFill>
-            <a:srgbClr val="D6E5EA"/>
+            <a:srgbClr val="D5EEF6"/>
           </a:solidFill>
           <a:ln w="19050">
-            <a:solidFill>
-              <a:srgbClr val="497483"/>
-            </a:solidFill>
+            <a:noFill/>
             <a:prstDash val="dash"/>
           </a:ln>
         </p:spPr>
@@ -4966,7 +5552,7 @@
             <a:r>
               <a:rPr sz="1200" b="0" i="0">
                 <a:solidFill>
-                  <a:srgbClr val="253A41"/>
+                  <a:srgbClr val="8E8780"/>
                 </a:solidFill>
               </a:rPr>
               <a:t>사진 4</a:t>
@@ -4976,14 +5562,14 @@
       </p:sp>
       <p:sp>
         <p:nvSpPr>
-          <p:cNvPr id="8" name="사진 자리"/>
+          <p:cNvPr id="11" name="사진 자리"/>
           <p:cNvSpPr/>
           <p:nvPr/>
         </p:nvSpPr>
         <p:spPr>
           <a:xfrm>
-            <a:off x="4338218" y="4114800"/>
-            <a:ext cx="3515258" cy="2286000"/>
+            <a:off x="4338218" y="3977639"/>
+            <a:ext cx="3515258" cy="2194560"/>
           </a:xfrm>
           <a:prstGeom prst="roundRect">
             <a:avLst>
@@ -4991,12 +5577,10 @@
             </a:avLst>
           </a:prstGeom>
           <a:solidFill>
-            <a:srgbClr val="D6E5EA"/>
+            <a:srgbClr val="D5EEF6"/>
           </a:solidFill>
           <a:ln w="19050">
-            <a:solidFill>
-              <a:srgbClr val="497483"/>
-            </a:solidFill>
+            <a:noFill/>
             <a:prstDash val="dash"/>
           </a:ln>
         </p:spPr>
@@ -5014,7 +5598,7 @@
             <a:r>
               <a:rPr sz="1200" b="0" i="0">
                 <a:solidFill>
-                  <a:srgbClr val="253A41"/>
+                  <a:srgbClr val="8E8780"/>
                 </a:solidFill>
               </a:rPr>
               <a:t>사진 5</a:t>
@@ -5024,14 +5608,14 @@
       </p:sp>
       <p:sp>
         <p:nvSpPr>
-          <p:cNvPr id="9" name="사진 자리"/>
+          <p:cNvPr id="12" name="사진 자리"/>
           <p:cNvSpPr/>
           <p:nvPr/>
         </p:nvSpPr>
         <p:spPr>
           <a:xfrm>
-            <a:off x="8036356" y="4114800"/>
-            <a:ext cx="3515258" cy="2286000"/>
+            <a:off x="8036356" y="3977639"/>
+            <a:ext cx="3515258" cy="2194560"/>
           </a:xfrm>
           <a:prstGeom prst="roundRect">
             <a:avLst>
@@ -5039,12 +5623,10 @@
             </a:avLst>
           </a:prstGeom>
           <a:solidFill>
-            <a:srgbClr val="D6E5EA"/>
+            <a:srgbClr val="D5EEF6"/>
           </a:solidFill>
           <a:ln w="19050">
-            <a:solidFill>
-              <a:srgbClr val="497483"/>
-            </a:solidFill>
+            <a:noFill/>
             <a:prstDash val="dash"/>
           </a:ln>
         </p:spPr>
@@ -5062,7 +5644,7 @@
             <a:r>
               <a:rPr sz="1200" b="0" i="0">
                 <a:solidFill>
-                  <a:srgbClr val="253A41"/>
+                  <a:srgbClr val="8E8780"/>
                 </a:solidFill>
               </a:rPr>
               <a:t>사진 6</a:t>
@@ -5081,6 +5663,14 @@
 <file path=ppt/slides/slide6.xml><?xml version="1.0" encoding="utf-8"?>
 <p:sld xmlns:a="http://schemas.openxmlformats.org/drawingml/2006/main" xmlns:p="http://schemas.openxmlformats.org/presentationml/2006/main" xmlns:r="http://schemas.openxmlformats.org/officeDocument/2006/relationships">
   <p:cSld>
+    <p:bg>
+      <p:bgPr>
+        <a:solidFill>
+          <a:srgbClr val="D5EEF6"/>
+        </a:solidFill>
+        <a:effectLst/>
+      </p:bgPr>
+    </p:bg>
     <p:spTree>
       <p:nvGrpSpPr>
         <p:cNvPr id="1" name=""/>
@@ -5088,30 +5678,120 @@
         <p:nvPr/>
       </p:nvGrpSpPr>
       <p:grpSpPr/>
-      <p:pic>
-        <p:nvPicPr>
-          <p:cNvPr id="3" name="표지 그림" descr="wedding-46.jpg"/>
-          <p:cNvPicPr>
-            <a:picLocks noChangeAspect="1"/>
-          </p:cNvPicPr>
+      <p:sp>
+        <p:nvSpPr>
+          <p:cNvPr id="3" name="사진 자리"/>
+          <p:cNvSpPr/>
           <p:nvPr/>
-        </p:nvPicPr>
-        <p:blipFill>
-          <a:blip r:embed="rId2"/>
-          <a:stretch>
-            <a:fillRect/>
-          </a:stretch>
-        </p:blipFill>
-        <p:spPr>
-          <a:xfrm>
-            <a:off x="0" y="0"/>
-            <a:ext cx="12191695" cy="6858000"/>
+        </p:nvSpPr>
+        <p:spPr>
+          <a:xfrm>
+            <a:off x="7071183" y="960120"/>
+            <a:ext cx="3657508" cy="4526280"/>
+          </a:xfrm>
+          <a:prstGeom prst="roundRect">
+            <a:avLst>
+              <a:gd name="adj" fmla="val 4000"/>
+            </a:avLst>
+          </a:prstGeom>
+          <a:solidFill>
+            <a:srgbClr val="ADDBEB"/>
+          </a:solidFill>
+          <a:ln>
+            <a:noFill/>
+          </a:ln>
+        </p:spPr>
+        <p:txBody>
+          <a:bodyPr rtlCol="0" anchor="ctr" wrap="square" lIns="54864" rIns="54864" tIns="27432" bIns="27432">
+            <a:noAutofit/>
+          </a:bodyPr>
+          <a:lstStyle/>
+          <a:p>
+            <a:pPr algn="ctr">
+              <a:lnSpc>
+                <a:spcPct val="100000"/>
+              </a:lnSpc>
+            </a:pPr>
+            <a:r>
+              <a:rPr sz="1400" b="0" i="0">
+                <a:solidFill>
+                  <a:srgbClr val="274149"/>
+                </a:solidFill>
+              </a:rPr>
+              <a:t>사진을 넣어 주세요</a:t>
+            </a:r>
+          </a:p>
+        </p:txBody>
+      </p:sp>
+      <p:sp>
+        <p:nvSpPr>
+          <p:cNvPr id="4" name="장식"/>
+          <p:cNvSpPr/>
+          <p:nvPr/>
+        </p:nvSpPr>
+        <p:spPr>
+          <a:xfrm>
+            <a:off x="7558851" y="1234439"/>
+            <a:ext cx="3657508" cy="4526280"/>
+          </a:xfrm>
+          <a:prstGeom prst="roundRect">
+            <a:avLst>
+              <a:gd name="adj" fmla="val 4000"/>
+            </a:avLst>
+          </a:prstGeom>
+          <a:noFill/>
+          <a:ln w="9525">
+            <a:solidFill>
+              <a:srgbClr val="26231F"/>
+            </a:solidFill>
+          </a:ln>
+        </p:spPr>
+        <p:txBody>
+          <a:bodyPr rtlCol="0" anchor="ctr"/>
+          <a:lstStyle/>
+          <a:p>
+            <a:pPr algn="ctr"/>
+          </a:p>
+        </p:txBody>
+      </p:sp>
+      <p:sp>
+        <p:nvSpPr>
+          <p:cNvPr id="5" name="라벨"/>
+          <p:cNvSpPr txBox="1"/>
+          <p:nvPr/>
+        </p:nvSpPr>
+        <p:spPr>
+          <a:xfrm>
+            <a:off x="822960" y="2148840"/>
+            <a:ext cx="5608179" cy="274320"/>
           </a:xfrm>
           <a:prstGeom prst="rect">
             <a:avLst/>
           </a:prstGeom>
-        </p:spPr>
-      </p:pic>
+          <a:noFill/>
+        </p:spPr>
+        <p:txBody>
+          <a:bodyPr wrap="square" lIns="54864" rIns="54864" tIns="27432" bIns="27432" anchor="t">
+            <a:noAutofit/>
+          </a:bodyPr>
+          <a:lstStyle/>
+          <a:p>
+            <a:pPr algn="l">
+              <a:lnSpc>
+                <a:spcPct val="115000"/>
+              </a:lnSpc>
+            </a:pPr>
+            <a:r>
+              <a:rPr sz="1000" b="1" i="0" spc="250">
+                <a:solidFill>
+                  <a:srgbClr val="26231F"/>
+                </a:solidFill>
+              </a:rPr>
+              <a:t>WEDDING</a:t>
+            </a:r>
+          </a:p>
+        </p:txBody>
+      </p:sp>
       <p:sp>
         <p:nvSpPr>
           <p:cNvPr id="2" name="Title 1"/>
@@ -5124,8 +5804,8 @@
         </p:nvSpPr>
         <p:spPr>
           <a:xfrm>
-            <a:off x="853418" y="2057400"/>
-            <a:ext cx="6095847" cy="1554480"/>
+            <a:off x="822960" y="2606040"/>
+            <a:ext cx="5608179" cy="1188720"/>
           </a:xfrm>
         </p:spPr>
         <p:txBody>
@@ -5142,7 +5822,7 @@
             <a:r>
               <a:rPr sz="3400" b="1" i="0">
                 <a:solidFill>
-                  <a:srgbClr val="253A41"/>
+                  <a:srgbClr val="26231F"/>
                 </a:solidFill>
               </a:rPr>
               <a:t>와 주셔서 고맙습니다</a:t>
@@ -5152,14 +5832,14 @@
       </p:sp>
       <p:sp>
         <p:nvSpPr>
-          <p:cNvPr id="4" name="한 줄 문구"/>
+          <p:cNvPr id="6" name="한 줄 문구"/>
           <p:cNvSpPr txBox="1"/>
           <p:nvPr/>
         </p:nvSpPr>
         <p:spPr>
           <a:xfrm>
-            <a:off x="853418" y="3749039"/>
-            <a:ext cx="6095847" cy="822960"/>
+            <a:off x="822960" y="3886200"/>
+            <a:ext cx="5608179" cy="822960"/>
           </a:xfrm>
           <a:prstGeom prst="rect">
             <a:avLst/>
@@ -5178,9 +5858,9 @@
               </a:lnSpc>
             </a:pPr>
             <a:r>
-              <a:rPr sz="1700" b="0" i="1">
-                <a:solidFill>
-                  <a:srgbClr val="253A41"/>
+              <a:rPr sz="1700" b="0" i="0">
+                <a:solidFill>
+                  <a:srgbClr val="26231F"/>
                 </a:solidFill>
               </a:rPr>
               <a:t>잘 살겠습니다</a:t>
@@ -5190,14 +5870,14 @@
       </p:sp>
       <p:sp>
         <p:nvSpPr>
-          <p:cNvPr id="5" name="안내 문구"/>
+          <p:cNvPr id="7" name="안내 문구"/>
           <p:cNvSpPr txBox="1"/>
           <p:nvPr/>
         </p:nvSpPr>
         <p:spPr>
           <a:xfrm>
-            <a:off x="853418" y="4617720"/>
-            <a:ext cx="6095847" cy="914400"/>
+            <a:off x="822960" y="4754880"/>
+            <a:ext cx="5608179" cy="914400"/>
           </a:xfrm>
           <a:prstGeom prst="rect">
             <a:avLst/>
@@ -5218,7 +5898,7 @@
             <a:r>
               <a:rPr sz="1400" b="0" i="0">
                 <a:solidFill>
-                  <a:srgbClr val="666666"/>
+                  <a:srgbClr val="26231F"/>
                 </a:solidFill>
               </a:rPr>
               <a:t>신랑 이름 ♥ 신부 이름</a:t>
@@ -5245,34 +5925,34 @@
         <a:sysClr val="window" lastClr="FFFFFF"/>
       </a:lt1>
       <a:dk2>
-        <a:srgbClr val="253A41"/>
+        <a:srgbClr val="274149"/>
       </a:dk2>
       <a:lt2>
-        <a:srgbClr val="F2F6F8"/>
+        <a:srgbClr val="ECF7FB"/>
       </a:lt2>
       <a:accent1>
-        <a:srgbClr val="497483"/>
+        <a:srgbClr val="98CFE1"/>
       </a:accent1>
       <a:accent2>
-        <a:srgbClr val="834958"/>
+        <a:srgbClr val="B8C6EA"/>
       </a:accent2>
       <a:accent3>
-        <a:srgbClr val="253A41"/>
+        <a:srgbClr val="274149"/>
       </a:accent3>
       <a:accent4>
-        <a:srgbClr val="D6E5EA"/>
+        <a:srgbClr val="D5EEF6"/>
       </a:accent4>
       <a:accent5>
-        <a:srgbClr val="665E6E"/>
+        <a:srgbClr val="A8CAE6"/>
       </a:accent5>
       <a:accent6>
-        <a:srgbClr val="7C898D"/>
+        <a:srgbClr val="7D8D92"/>
       </a:accent6>
       <a:hlink>
-        <a:srgbClr val="497483"/>
+        <a:srgbClr val="98CFE1"/>
       </a:hlink>
       <a:folHlink>
-        <a:srgbClr val="253A41"/>
+        <a:srgbClr val="274149"/>
       </a:folHlink>
     </a:clrScheme>
     <a:fontScheme name="Office">
